--- a/docs/paper/diagram-sources-2026-09-16/figS5_crossovers.pptx
+++ b/docs/paper/diagram-sources-2026-09-16/figS5_crossovers.pptx
@@ -8,7 +8,7 @@
     <p:sldId id="256" r:id="rId7"/>
     <p:sldId id="257" r:id="rId9"/>
   </p:sldIdLst>
-  <p:sldSz cx="6408000" cy="6156000" type="screen4x3"/>
+  <p:sldSz cx="6408000" cy="3186000" type="screen4x3"/>
   <p:notesSz cx="6858000" cy="9144000"/>
   <p:defaultTextStyle>
     <a:defPPr>
@@ -3588,7 +3588,7 @@
         <p:spPr>
           <a:xfrm>
             <a:off x="0" y="0"/>
-            <a:ext cx="6408000" cy="6156000"/>
+            <a:ext cx="6408000" cy="3186000"/>
           </a:xfrm>
           <a:prstGeom prst="rect">
             <a:avLst/>
@@ -3640,7 +3640,7 @@
         <p:spPr>
           <a:xfrm>
             <a:off x="0" y="0"/>
-            <a:ext cx="3420000" cy="2970000"/>
+            <a:ext cx="2988000" cy="2970000"/>
           </a:xfrm>
           <a:prstGeom prst="rect">
             <a:avLst/>
@@ -3663,65 +3663,17 @@
         </p:blipFill>
         <p:spPr>
           <a:xfrm>
-            <a:off x="3420000" y="0"/>
-            <a:ext cx="2988000" cy="2970000"/>
+            <a:off x="3132000" y="0"/>
+            <a:ext cx="3204000" cy="3186000"/>
           </a:xfrm>
           <a:prstGeom prst="rect">
             <a:avLst/>
           </a:prstGeom>
         </p:spPr>
       </p:pic>
-      <p:pic>
-        <p:nvPicPr>
-          <p:cNvPr id="5" name="panel-c-image" descr="figS5_crossovers.c.png"/>
-          <p:cNvPicPr>
-            <a:picLocks noChangeAspect="1"/>
-          </p:cNvPicPr>
-          <p:nvPr/>
-        </p:nvPicPr>
-        <p:blipFill>
-          <a:blip r:embed="rId5"/>
-          <a:stretch>
-            <a:fillRect/>
-          </a:stretch>
-        </p:blipFill>
-        <p:spPr>
-          <a:xfrm>
-            <a:off x="0" y="2970000"/>
-            <a:ext cx="3420000" cy="3186000"/>
-          </a:xfrm>
-          <a:prstGeom prst="rect">
-            <a:avLst/>
-          </a:prstGeom>
-        </p:spPr>
-      </p:pic>
-      <p:pic>
-        <p:nvPicPr>
-          <p:cNvPr id="6" name="panel-d-image" descr="figS5_crossovers.d.png"/>
-          <p:cNvPicPr>
-            <a:picLocks noChangeAspect="1"/>
-          </p:cNvPicPr>
-          <p:nvPr/>
-        </p:nvPicPr>
-        <p:blipFill>
-          <a:blip r:embed="rId6"/>
-          <a:stretch>
-            <a:fillRect/>
-          </a:stretch>
-        </p:blipFill>
-        <p:spPr>
-          <a:xfrm>
-            <a:off x="3420000" y="2970000"/>
-            <a:ext cx="2988000" cy="3186000"/>
-          </a:xfrm>
-          <a:prstGeom prst="rect">
-            <a:avLst/>
-          </a:prstGeom>
-        </p:spPr>
-      </p:pic>
-      <p:sp>
-        <p:nvSpPr>
-          <p:cNvPr id="7" name="panel-a"/>
+      <p:sp>
+        <p:nvSpPr>
+          <p:cNvPr id="5" name="panel-a"/>
           <p:cNvSpPr txBox="1"/>
           <p:nvPr/>
         </p:nvSpPr>
@@ -3756,13 +3708,13 @@
       </p:sp>
       <p:sp>
         <p:nvSpPr>
-          <p:cNvPr id="8" name="panel-b"/>
+          <p:cNvPr id="6" name="panel-b"/>
           <p:cNvSpPr txBox="1"/>
           <p:nvPr/>
         </p:nvSpPr>
         <p:spPr>
           <a:xfrm>
-            <a:off x="3492000" y="18000"/>
+            <a:off x="3204000" y="18000"/>
             <a:ext cx="252000" cy="180000"/>
           </a:xfrm>
           <a:prstGeom prst="rect">
@@ -3785,76 +3737,6 @@
                 <a:latin typeface="Arial"/>
               </a:rPr>
               <a:t>(b)</a:t>
-            </a:r>
-          </a:p>
-        </p:txBody>
-      </p:sp>
-      <p:sp>
-        <p:nvSpPr>
-          <p:cNvPr id="9" name="panel-c"/>
-          <p:cNvSpPr txBox="1"/>
-          <p:nvPr/>
-        </p:nvSpPr>
-        <p:spPr>
-          <a:xfrm>
-            <a:off x="72000" y="2988000"/>
-            <a:ext cx="252000" cy="180000"/>
-          </a:xfrm>
-          <a:prstGeom prst="rect">
-            <a:avLst/>
-          </a:prstGeom>
-          <a:noFill/>
-        </p:spPr>
-        <p:txBody>
-          <a:bodyPr wrap="square" lIns="0" rIns="0" tIns="0" bIns="0">
-            <a:spAutoFit/>
-          </a:bodyPr>
-          <a:lstStyle/>
-          <a:p>
-            <a:pPr algn="l"/>
-            <a:r>
-              <a:rPr sz="1000" b="1">
-                <a:solidFill>
-                  <a:srgbClr val="1F2A30"/>
-                </a:solidFill>
-                <a:latin typeface="Arial"/>
-              </a:rPr>
-              <a:t>(c)</a:t>
-            </a:r>
-          </a:p>
-        </p:txBody>
-      </p:sp>
-      <p:sp>
-        <p:nvSpPr>
-          <p:cNvPr id="10" name="panel-d"/>
-          <p:cNvSpPr txBox="1"/>
-          <p:nvPr/>
-        </p:nvSpPr>
-        <p:spPr>
-          <a:xfrm>
-            <a:off x="3492000" y="2988000"/>
-            <a:ext cx="252000" cy="180000"/>
-          </a:xfrm>
-          <a:prstGeom prst="rect">
-            <a:avLst/>
-          </a:prstGeom>
-          <a:noFill/>
-        </p:spPr>
-        <p:txBody>
-          <a:bodyPr wrap="square" lIns="0" rIns="0" tIns="0" bIns="0">
-            <a:spAutoFit/>
-          </a:bodyPr>
-          <a:lstStyle/>
-          <a:p>
-            <a:pPr algn="l"/>
-            <a:r>
-              <a:rPr sz="1000" b="1">
-                <a:solidFill>
-                  <a:srgbClr val="1F2A30"/>
-                </a:solidFill>
-                <a:latin typeface="Arial"/>
-              </a:rPr>
-              <a:t>(d)</a:t>
             </a:r>
           </a:p>
         </p:txBody>
@@ -3886,7 +3768,7 @@
         <p:spPr>
           <a:xfrm>
             <a:off x="0" y="0"/>
-            <a:ext cx="6408000" cy="6156000"/>
+            <a:ext cx="6408000" cy="3186000"/>
           </a:xfrm>
           <a:prstGeom prst="rect">
             <a:avLst/>
@@ -3938,7 +3820,7 @@
         <p:spPr>
           <a:xfrm>
             <a:off x="0" y="0"/>
-            <a:ext cx="3420000" cy="2970000"/>
+            <a:ext cx="2988000" cy="2970000"/>
           </a:xfrm>
           <a:prstGeom prst="rect">
             <a:avLst/>
@@ -3961,65 +3843,17 @@
         </p:blipFill>
         <p:spPr>
           <a:xfrm>
-            <a:off x="3420000" y="0"/>
-            <a:ext cx="2988000" cy="2970000"/>
+            <a:off x="3132000" y="0"/>
+            <a:ext cx="3204000" cy="3186000"/>
           </a:xfrm>
           <a:prstGeom prst="rect">
             <a:avLst/>
           </a:prstGeom>
         </p:spPr>
       </p:pic>
-      <p:pic>
-        <p:nvPicPr>
-          <p:cNvPr id="5" name="panel-c-image" descr="figS5_crossovers.c.ko.png"/>
-          <p:cNvPicPr>
-            <a:picLocks noChangeAspect="1"/>
-          </p:cNvPicPr>
-          <p:nvPr/>
-        </p:nvPicPr>
-        <p:blipFill>
-          <a:blip r:embed="rId5"/>
-          <a:stretch>
-            <a:fillRect/>
-          </a:stretch>
-        </p:blipFill>
-        <p:spPr>
-          <a:xfrm>
-            <a:off x="0" y="2970000"/>
-            <a:ext cx="3420000" cy="3186000"/>
-          </a:xfrm>
-          <a:prstGeom prst="rect">
-            <a:avLst/>
-          </a:prstGeom>
-        </p:spPr>
-      </p:pic>
-      <p:pic>
-        <p:nvPicPr>
-          <p:cNvPr id="6" name="panel-d-image" descr="figS5_crossovers.d.ko.png"/>
-          <p:cNvPicPr>
-            <a:picLocks noChangeAspect="1"/>
-          </p:cNvPicPr>
-          <p:nvPr/>
-        </p:nvPicPr>
-        <p:blipFill>
-          <a:blip r:embed="rId6"/>
-          <a:stretch>
-            <a:fillRect/>
-          </a:stretch>
-        </p:blipFill>
-        <p:spPr>
-          <a:xfrm>
-            <a:off x="3420000" y="2970000"/>
-            <a:ext cx="2988000" cy="3186000"/>
-          </a:xfrm>
-          <a:prstGeom prst="rect">
-            <a:avLst/>
-          </a:prstGeom>
-        </p:spPr>
-      </p:pic>
-      <p:sp>
-        <p:nvSpPr>
-          <p:cNvPr id="7" name="panel-a"/>
+      <p:sp>
+        <p:nvSpPr>
+          <p:cNvPr id="5" name="panel-a"/>
           <p:cNvSpPr txBox="1"/>
           <p:nvPr/>
         </p:nvSpPr>
@@ -4054,13 +3888,13 @@
       </p:sp>
       <p:sp>
         <p:nvSpPr>
-          <p:cNvPr id="8" name="panel-b"/>
+          <p:cNvPr id="6" name="panel-b"/>
           <p:cNvSpPr txBox="1"/>
           <p:nvPr/>
         </p:nvSpPr>
         <p:spPr>
           <a:xfrm>
-            <a:off x="3492000" y="18000"/>
+            <a:off x="3204000" y="18000"/>
             <a:ext cx="252000" cy="180000"/>
           </a:xfrm>
           <a:prstGeom prst="rect">
@@ -4083,76 +3917,6 @@
                 <a:latin typeface="Arial"/>
               </a:rPr>
               <a:t>(b)</a:t>
-            </a:r>
-          </a:p>
-        </p:txBody>
-      </p:sp>
-      <p:sp>
-        <p:nvSpPr>
-          <p:cNvPr id="9" name="panel-c"/>
-          <p:cNvSpPr txBox="1"/>
-          <p:nvPr/>
-        </p:nvSpPr>
-        <p:spPr>
-          <a:xfrm>
-            <a:off x="72000" y="2988000"/>
-            <a:ext cx="252000" cy="180000"/>
-          </a:xfrm>
-          <a:prstGeom prst="rect">
-            <a:avLst/>
-          </a:prstGeom>
-          <a:noFill/>
-        </p:spPr>
-        <p:txBody>
-          <a:bodyPr wrap="square" lIns="0" rIns="0" tIns="0" bIns="0">
-            <a:spAutoFit/>
-          </a:bodyPr>
-          <a:lstStyle/>
-          <a:p>
-            <a:pPr algn="l"/>
-            <a:r>
-              <a:rPr sz="1000" b="1">
-                <a:solidFill>
-                  <a:srgbClr val="1F2A30"/>
-                </a:solidFill>
-                <a:latin typeface="Arial"/>
-              </a:rPr>
-              <a:t>(c)</a:t>
-            </a:r>
-          </a:p>
-        </p:txBody>
-      </p:sp>
-      <p:sp>
-        <p:nvSpPr>
-          <p:cNvPr id="10" name="panel-d"/>
-          <p:cNvSpPr txBox="1"/>
-          <p:nvPr/>
-        </p:nvSpPr>
-        <p:spPr>
-          <a:xfrm>
-            <a:off x="3492000" y="2988000"/>
-            <a:ext cx="252000" cy="180000"/>
-          </a:xfrm>
-          <a:prstGeom prst="rect">
-            <a:avLst/>
-          </a:prstGeom>
-          <a:noFill/>
-        </p:spPr>
-        <p:txBody>
-          <a:bodyPr wrap="square" lIns="0" rIns="0" tIns="0" bIns="0">
-            <a:spAutoFit/>
-          </a:bodyPr>
-          <a:lstStyle/>
-          <a:p>
-            <a:pPr algn="l"/>
-            <a:r>
-              <a:rPr sz="1000" b="1">
-                <a:solidFill>
-                  <a:srgbClr val="1F2A30"/>
-                </a:solidFill>
-                <a:latin typeface="Arial"/>
-              </a:rPr>
-              <a:t>(d)</a:t>
             </a:r>
           </a:p>
         </p:txBody>

--- a/docs/paper/diagram-sources-2026-09-16/figS5_crossovers.pptx
+++ b/docs/paper/diagram-sources-2026-09-16/figS5_crossovers.pptx
@@ -8,7 +8,7 @@
     <p:sldId id="256" r:id="rId7"/>
     <p:sldId id="257" r:id="rId9"/>
   </p:sldIdLst>
-  <p:sldSz cx="6408000" cy="3186000" type="screen4x3"/>
+  <p:sldSz cx="6408000" cy="2520000" type="screen4x3"/>
   <p:notesSz cx="6858000" cy="9144000"/>
   <p:defaultTextStyle>
     <a:defPPr>
@@ -3588,7 +3588,7 @@
         <p:spPr>
           <a:xfrm>
             <a:off x="0" y="0"/>
-            <a:ext cx="6408000" cy="3186000"/>
+            <a:ext cx="6408000" cy="2520000"/>
           </a:xfrm>
           <a:prstGeom prst="rect">
             <a:avLst/>
@@ -3640,16 +3640,51 @@
         <p:spPr>
           <a:xfrm>
             <a:off x="0" y="0"/>
-            <a:ext cx="2988000" cy="2970000"/>
+            <a:ext cx="1872000" cy="2520000"/>
           </a:xfrm>
           <a:prstGeom prst="rect">
             <a:avLst/>
           </a:prstGeom>
         </p:spPr>
       </p:pic>
+      <p:sp>
+        <p:nvSpPr>
+          <p:cNvPr id="4" name="panel-a"/>
+          <p:cNvSpPr txBox="1"/>
+          <p:nvPr/>
+        </p:nvSpPr>
+        <p:spPr>
+          <a:xfrm>
+            <a:off x="36000" y="126000"/>
+            <a:ext cx="252000" cy="180000"/>
+          </a:xfrm>
+          <a:prstGeom prst="rect">
+            <a:avLst/>
+          </a:prstGeom>
+          <a:noFill/>
+        </p:spPr>
+        <p:txBody>
+          <a:bodyPr wrap="square" lIns="0" rIns="0" tIns="0" bIns="0">
+            <a:spAutoFit/>
+          </a:bodyPr>
+          <a:lstStyle/>
+          <a:p>
+            <a:pPr algn="l"/>
+            <a:r>
+              <a:rPr sz="1000" b="1">
+                <a:solidFill>
+                  <a:srgbClr val="1F2A30"/>
+                </a:solidFill>
+                <a:latin typeface="Arial"/>
+              </a:rPr>
+              <a:t>(a)</a:t>
+            </a:r>
+          </a:p>
+        </p:txBody>
+      </p:sp>
       <p:pic>
         <p:nvPicPr>
-          <p:cNvPr id="4" name="panel-b-image" descr="figS5_crossovers.b.png"/>
+          <p:cNvPr id="5" name="panel-b-image" descr="figS5_crossovers.b.png"/>
           <p:cNvPicPr>
             <a:picLocks noChangeAspect="1"/>
           </p:cNvPicPr>
@@ -3663,8 +3698,8 @@
         </p:blipFill>
         <p:spPr>
           <a:xfrm>
-            <a:off x="3132000" y="0"/>
-            <a:ext cx="3204000" cy="3186000"/>
+            <a:off x="1872000" y="0"/>
+            <a:ext cx="1872000" cy="2520000"/>
           </a:xfrm>
           <a:prstGeom prst="rect">
             <a:avLst/>
@@ -3673,13 +3708,13 @@
       </p:pic>
       <p:sp>
         <p:nvSpPr>
-          <p:cNvPr id="5" name="panel-a"/>
+          <p:cNvPr id="6" name="panel-b"/>
           <p:cNvSpPr txBox="1"/>
           <p:nvPr/>
         </p:nvSpPr>
         <p:spPr>
           <a:xfrm>
-            <a:off x="72000" y="18000"/>
+            <a:off x="1908000" y="126000"/>
             <a:ext cx="252000" cy="180000"/>
           </a:xfrm>
           <a:prstGeom prst="rect">
@@ -3701,20 +3736,44 @@
                 </a:solidFill>
                 <a:latin typeface="Arial"/>
               </a:rPr>
-              <a:t>(a)</a:t>
-            </a:r>
-          </a:p>
-        </p:txBody>
-      </p:sp>
-      <p:sp>
-        <p:nvSpPr>
-          <p:cNvPr id="6" name="panel-b"/>
+              <a:t>(b)</a:t>
+            </a:r>
+          </a:p>
+        </p:txBody>
+      </p:sp>
+      <p:pic>
+        <p:nvPicPr>
+          <p:cNvPr id="7" name="panel-c-image" descr="figS5_crossovers.c.png"/>
+          <p:cNvPicPr>
+            <a:picLocks noChangeAspect="1"/>
+          </p:cNvPicPr>
+          <p:nvPr/>
+        </p:nvPicPr>
+        <p:blipFill>
+          <a:blip r:embed="rId5"/>
+          <a:stretch>
+            <a:fillRect/>
+          </a:stretch>
+        </p:blipFill>
+        <p:spPr>
+          <a:xfrm>
+            <a:off x="3744000" y="0"/>
+            <a:ext cx="2664000" cy="2520000"/>
+          </a:xfrm>
+          <a:prstGeom prst="rect">
+            <a:avLst/>
+          </a:prstGeom>
+        </p:spPr>
+      </p:pic>
+      <p:sp>
+        <p:nvSpPr>
+          <p:cNvPr id="8" name="panel-c"/>
           <p:cNvSpPr txBox="1"/>
           <p:nvPr/>
         </p:nvSpPr>
         <p:spPr>
           <a:xfrm>
-            <a:off x="3204000" y="18000"/>
+            <a:off x="3780000" y="126000"/>
             <a:ext cx="252000" cy="180000"/>
           </a:xfrm>
           <a:prstGeom prst="rect">
@@ -3736,7 +3795,7 @@
                 </a:solidFill>
                 <a:latin typeface="Arial"/>
               </a:rPr>
-              <a:t>(b)</a:t>
+              <a:t>(c)</a:t>
             </a:r>
           </a:p>
         </p:txBody>
@@ -3768,7 +3827,7 @@
         <p:spPr>
           <a:xfrm>
             <a:off x="0" y="0"/>
-            <a:ext cx="6408000" cy="3186000"/>
+            <a:ext cx="6408000" cy="2520000"/>
           </a:xfrm>
           <a:prstGeom prst="rect">
             <a:avLst/>
@@ -3820,16 +3879,51 @@
         <p:spPr>
           <a:xfrm>
             <a:off x="0" y="0"/>
-            <a:ext cx="2988000" cy="2970000"/>
+            <a:ext cx="1872000" cy="2520000"/>
           </a:xfrm>
           <a:prstGeom prst="rect">
             <a:avLst/>
           </a:prstGeom>
         </p:spPr>
       </p:pic>
+      <p:sp>
+        <p:nvSpPr>
+          <p:cNvPr id="4" name="panel-a"/>
+          <p:cNvSpPr txBox="1"/>
+          <p:nvPr/>
+        </p:nvSpPr>
+        <p:spPr>
+          <a:xfrm>
+            <a:off x="36000" y="126000"/>
+            <a:ext cx="252000" cy="180000"/>
+          </a:xfrm>
+          <a:prstGeom prst="rect">
+            <a:avLst/>
+          </a:prstGeom>
+          <a:noFill/>
+        </p:spPr>
+        <p:txBody>
+          <a:bodyPr wrap="square" lIns="0" rIns="0" tIns="0" bIns="0">
+            <a:spAutoFit/>
+          </a:bodyPr>
+          <a:lstStyle/>
+          <a:p>
+            <a:pPr algn="l"/>
+            <a:r>
+              <a:rPr sz="1000" b="1">
+                <a:solidFill>
+                  <a:srgbClr val="1F2A30"/>
+                </a:solidFill>
+                <a:latin typeface="Arial"/>
+              </a:rPr>
+              <a:t>(a)</a:t>
+            </a:r>
+          </a:p>
+        </p:txBody>
+      </p:sp>
       <p:pic>
         <p:nvPicPr>
-          <p:cNvPr id="4" name="panel-b-image" descr="figS5_crossovers.b.ko.png"/>
+          <p:cNvPr id="5" name="panel-b-image" descr="figS5_crossovers.b.ko.png"/>
           <p:cNvPicPr>
             <a:picLocks noChangeAspect="1"/>
           </p:cNvPicPr>
@@ -3843,8 +3937,8 @@
         </p:blipFill>
         <p:spPr>
           <a:xfrm>
-            <a:off x="3132000" y="0"/>
-            <a:ext cx="3204000" cy="3186000"/>
+            <a:off x="1872000" y="0"/>
+            <a:ext cx="1872000" cy="2520000"/>
           </a:xfrm>
           <a:prstGeom prst="rect">
             <a:avLst/>
@@ -3853,13 +3947,13 @@
       </p:pic>
       <p:sp>
         <p:nvSpPr>
-          <p:cNvPr id="5" name="panel-a"/>
+          <p:cNvPr id="6" name="panel-b"/>
           <p:cNvSpPr txBox="1"/>
           <p:nvPr/>
         </p:nvSpPr>
         <p:spPr>
           <a:xfrm>
-            <a:off x="72000" y="18000"/>
+            <a:off x="1908000" y="126000"/>
             <a:ext cx="252000" cy="180000"/>
           </a:xfrm>
           <a:prstGeom prst="rect">
@@ -3881,20 +3975,44 @@
                 </a:solidFill>
                 <a:latin typeface="Arial"/>
               </a:rPr>
-              <a:t>(a)</a:t>
-            </a:r>
-          </a:p>
-        </p:txBody>
-      </p:sp>
-      <p:sp>
-        <p:nvSpPr>
-          <p:cNvPr id="6" name="panel-b"/>
+              <a:t>(b)</a:t>
+            </a:r>
+          </a:p>
+        </p:txBody>
+      </p:sp>
+      <p:pic>
+        <p:nvPicPr>
+          <p:cNvPr id="7" name="panel-c-image" descr="figS5_crossovers.c.ko.png"/>
+          <p:cNvPicPr>
+            <a:picLocks noChangeAspect="1"/>
+          </p:cNvPicPr>
+          <p:nvPr/>
+        </p:nvPicPr>
+        <p:blipFill>
+          <a:blip r:embed="rId5"/>
+          <a:stretch>
+            <a:fillRect/>
+          </a:stretch>
+        </p:blipFill>
+        <p:spPr>
+          <a:xfrm>
+            <a:off x="3744000" y="0"/>
+            <a:ext cx="2664000" cy="2520000"/>
+          </a:xfrm>
+          <a:prstGeom prst="rect">
+            <a:avLst/>
+          </a:prstGeom>
+        </p:spPr>
+      </p:pic>
+      <p:sp>
+        <p:nvSpPr>
+          <p:cNvPr id="8" name="panel-c"/>
           <p:cNvSpPr txBox="1"/>
           <p:nvPr/>
         </p:nvSpPr>
         <p:spPr>
           <a:xfrm>
-            <a:off x="3204000" y="18000"/>
+            <a:off x="3780000" y="126000"/>
             <a:ext cx="252000" cy="180000"/>
           </a:xfrm>
           <a:prstGeom prst="rect">
@@ -3916,7 +4034,7 @@
                 </a:solidFill>
                 <a:latin typeface="Arial"/>
               </a:rPr>
-              <a:t>(b)</a:t>
+              <a:t>(c)</a:t>
             </a:r>
           </a:p>
         </p:txBody>
